--- a/linear-algebra/mtd&smv/MTD&SMV.pptx
+++ b/linear-algebra/mtd&smv/MTD&SMV.pptx
@@ -4549,11 +4549,11 @@
           <a:lstStyle/>
           <a:p>
             <a:r>
-              <a:rPr lang="nl-NL" sz="5400" b="1" u="sng" dirty="0"/>
+              <a:rPr lang="nl-NL" sz="4800" b="1" u="sng" dirty="0"/>
               <a:t>Special matrices – </a:t>
             </a:r>
             <a:r>
-              <a:rPr lang="nl-NL" sz="5400" b="1" u="sng" dirty="0">
+              <a:rPr lang="nl-NL" sz="4800" b="1" u="sng" dirty="0">
                 <a:solidFill>
                   <a:schemeClr val="accent3">
                     <a:lumMod val="60000"/>
@@ -4580,7 +4580,7 @@
         </p:nvSpPr>
         <p:spPr>
           <a:xfrm>
-            <a:off x="446313" y="1415142"/>
+            <a:off x="370114" y="1549174"/>
             <a:ext cx="10091057" cy="4062651"/>
           </a:xfrm>
           <a:prstGeom prst="rect">
@@ -4990,11 +4990,11 @@
           <a:lstStyle/>
           <a:p>
             <a:r>
-              <a:rPr lang="nl-NL" sz="5400" b="1" u="sng" dirty="0"/>
+              <a:rPr lang="nl-NL" sz="4800" b="1" u="sng" dirty="0"/>
               <a:t>Special matrices – </a:t>
             </a:r>
             <a:r>
-              <a:rPr lang="nl-NL" sz="5400" b="1" u="sng" dirty="0">
+              <a:rPr lang="nl-NL" sz="4800" b="1" u="sng" dirty="0">
                 <a:solidFill>
                   <a:schemeClr val="bg1">
                     <a:lumMod val="75000"/>
@@ -5005,7 +5005,7 @@
               <a:t>Zero/</a:t>
             </a:r>
             <a:r>
-              <a:rPr lang="nl-NL" sz="5400" b="1" u="sng" dirty="0" err="1">
+              <a:rPr lang="nl-NL" sz="4800" b="1" u="sng" dirty="0" err="1">
                 <a:solidFill>
                   <a:schemeClr val="bg1">
                     <a:lumMod val="75000"/>
@@ -5016,7 +5016,7 @@
               <a:t>null</a:t>
             </a:r>
             <a:r>
-              <a:rPr lang="nl-NL" sz="5400" b="1" u="sng" dirty="0">
+              <a:rPr lang="nl-NL" sz="4800" b="1" u="sng" dirty="0">
                 <a:solidFill>
                   <a:schemeClr val="bg1">
                     <a:lumMod val="75000"/>
@@ -5043,7 +5043,7 @@
         </p:nvSpPr>
         <p:spPr>
           <a:xfrm>
-            <a:off x="446313" y="1415142"/>
+            <a:off x="370114" y="1549174"/>
             <a:ext cx="10091057" cy="4154984"/>
           </a:xfrm>
           <a:prstGeom prst="rect">
